--- a/data/input/templates/pptx_template.vis_14.test.pptx
+++ b/data/input/templates/pptx_template.vis_14.test.pptx
@@ -243,7 +243,7 @@
           <a:p>
             <a:fld id="{DC6821C8-422F-4CA2-85E1-19A6D027F030}" type="datetimeFigureOut">
               <a:rPr lang="en-US" smtClean="0"/>
-              <a:t>9/3/2026</a:t>
+              <a:t>9/23/2026</a:t>
             </a:fld>
             <a:endParaRPr lang="en-US"/>
           </a:p>
@@ -431,7 +431,7 @@
             <a:fld id="{68D86595-6E20-4226-9E0D-B3822373F9DE}" type="datetimeFigureOut">
               <a:rPr lang="en-US" smtClean="0"/>
               <a:pPr/>
-              <a:t>9/3/2026</a:t>
+              <a:t>9/23/2026</a:t>
             </a:fld>
             <a:endParaRPr lang="en-US"/>
           </a:p>
@@ -11861,7 +11861,7 @@
             </a:extLst>
           </p:cNvPr>
           <p:cNvPicPr>
-            <a:picLocks noChangeAspect="1"/>
+            <a:picLocks/>
           </p:cNvPicPr>
           <p:nvPr/>
         </p:nvPicPr>
@@ -11880,7 +11880,7 @@
         <p:spPr>
           <a:xfrm>
             <a:off x="-1" y="1285665"/>
-            <a:ext cx="12188977" cy="5405812"/>
+            <a:ext cx="12188977" cy="5349240"/>
           </a:xfrm>
           <a:prstGeom prst="rect">
             <a:avLst/>
@@ -13079,15 +13079,6 @@
 </file>
 
 <file path=customXml/item2.xml><?xml version="1.0" encoding="utf-8"?>
-<?mso-contentType ?>
-<FormTemplates xmlns="http://schemas.microsoft.com/sharepoint/v3/contenttype/forms">
-  <Display>DocumentLibraryForm</Display>
-  <Edit>DocumentLibraryForm</Edit>
-  <New>DocumentLibraryForm</New>
-</FormTemplates>
-</file>
-
-<file path=customXml/item3.xml><?xml version="1.0" encoding="utf-8"?>
 <p:properties xmlns:p="http://schemas.microsoft.com/office/2006/metadata/properties" xmlns:xsi="http://www.w3.org/2001/XMLSchema-instance" xmlns:pc="http://schemas.microsoft.com/office/infopath/2007/PartnerControls">
   <documentManagement>
     <lcf76f155ced4ddcb4097134ff3c332f xmlns="05b33221-363d-4d44-afe3-1e10ae3da870">
@@ -13098,6 +13089,15 @@
     <_ip_UnifiedCompliancePolicyProperties xmlns="http://schemas.microsoft.com/sharepoint/v3" xsi:nil="true"/>
   </documentManagement>
 </p:properties>
+</file>
+
+<file path=customXml/item3.xml><?xml version="1.0" encoding="utf-8"?>
+<?mso-contentType ?>
+<FormTemplates xmlns="http://schemas.microsoft.com/sharepoint/v3/contenttype/forms">
+  <Display>DocumentLibraryForm</Display>
+  <Edit>DocumentLibraryForm</Edit>
+  <New>DocumentLibraryForm</New>
+</FormTemplates>
 </file>
 
 <file path=customXml/itemProps1.xml><?xml version="1.0" encoding="utf-8"?>
@@ -13121,14 +13121,6 @@
 </file>
 
 <file path=customXml/itemProps2.xml><?xml version="1.0" encoding="utf-8"?>
-<ds:datastoreItem xmlns:ds="http://schemas.openxmlformats.org/officeDocument/2006/customXml" ds:itemID="{2A1CCD50-0B2F-4685-A6F7-F328002129B4}">
-  <ds:schemaRefs>
-    <ds:schemaRef ds:uri="http://schemas.microsoft.com/sharepoint/v3/contenttype/forms"/>
-  </ds:schemaRefs>
-</ds:datastoreItem>
-</file>
-
-<file path=customXml/itemProps3.xml><?xml version="1.0" encoding="utf-8"?>
 <ds:datastoreItem xmlns:ds="http://schemas.openxmlformats.org/officeDocument/2006/customXml" ds:itemID="{49FE8081-5A08-4CEC-98F7-B9DDB3604F60}">
   <ds:schemaRefs>
     <ds:schemaRef ds:uri="05b33221-363d-4d44-afe3-1e10ae3da870"/>
@@ -13146,6 +13138,14 @@
 </ds:datastoreItem>
 </file>
 
+<file path=customXml/itemProps3.xml><?xml version="1.0" encoding="utf-8"?>
+<ds:datastoreItem xmlns:ds="http://schemas.openxmlformats.org/officeDocument/2006/customXml" ds:itemID="{2A1CCD50-0B2F-4685-A6F7-F328002129B4}">
+  <ds:schemaRefs>
+    <ds:schemaRef ds:uri="http://schemas.microsoft.com/sharepoint/v3/contenttype/forms"/>
+  </ds:schemaRefs>
+</ds:datastoreItem>
+</file>
+
 <file path=docMetadata/LabelInfo.xml><?xml version="1.0" encoding="utf-8"?>
 <clbl:labelList xmlns:clbl="http://schemas.microsoft.com/office/2020/mipLabelMetadata">
   <clbl:label id="{5563d9c4-1af6-4d5e-894d-8f5a4315f709}" enabled="1" method="Privileged" siteId="{3667e201-cbdc-48b3-9b42-5d2d3f16e2a9}" removed="0"/>
